--- a/CS618-Data-Efficient-Learning-Mohammed_Alanazi.pptx
+++ b/CS618-Data-Efficient-Learning-Mohammed_Alanazi.pptx
@@ -3303,7 +3303,7 @@
           <a:p>
             <a:fld id="{21C763D3-CF6A-9540-9F1D-1BA3E4F7256B}" type="datetimeFigureOut">
               <a:rPr lang="en-SA" smtClean="0"/>
-              <a:t>07/05/2026 R</a:t>
+              <a:t>12/05/2026 R</a:t>
             </a:fld>
             <a:endParaRPr lang="en-SA"/>
           </a:p>
@@ -3720,7 +3720,7 @@
           <a:p>
             <a:fld id="{72345051-2045-45DA-935E-2E3CA1A69ADC}" type="datetimeFigureOut">
               <a:rPr lang="en-US" smtClean="0"/>
-              <a:t>5/7/26</a:t>
+              <a:t>5/12/26</a:t>
             </a:fld>
             <a:endParaRPr lang="en-US" dirty="0"/>
           </a:p>
@@ -3920,7 +3920,7 @@
           <a:p>
             <a:fld id="{72345051-2045-45DA-935E-2E3CA1A69ADC}" type="datetimeFigureOut">
               <a:rPr lang="en-US" smtClean="0"/>
-              <a:t>5/7/26</a:t>
+              <a:t>5/12/26</a:t>
             </a:fld>
             <a:endParaRPr lang="en-US"/>
           </a:p>
@@ -4130,7 +4130,7 @@
           <a:p>
             <a:fld id="{72345051-2045-45DA-935E-2E3CA1A69ADC}" type="datetimeFigureOut">
               <a:rPr lang="en-US" smtClean="0"/>
-              <a:t>5/7/26</a:t>
+              <a:t>5/12/26</a:t>
             </a:fld>
             <a:endParaRPr lang="en-US"/>
           </a:p>
@@ -4330,7 +4330,7 @@
           <a:p>
             <a:fld id="{72345051-2045-45DA-935E-2E3CA1A69ADC}" type="datetimeFigureOut">
               <a:rPr lang="en-US" smtClean="0"/>
-              <a:t>5/7/26</a:t>
+              <a:t>5/12/26</a:t>
             </a:fld>
             <a:endParaRPr lang="en-US"/>
           </a:p>
@@ -4606,7 +4606,7 @@
           <a:p>
             <a:fld id="{72345051-2045-45DA-935E-2E3CA1A69ADC}" type="datetimeFigureOut">
               <a:rPr lang="en-US" smtClean="0"/>
-              <a:t>5/7/26</a:t>
+              <a:t>5/12/26</a:t>
             </a:fld>
             <a:endParaRPr lang="en-US"/>
           </a:p>
@@ -4874,7 +4874,7 @@
           <a:p>
             <a:fld id="{72345051-2045-45DA-935E-2E3CA1A69ADC}" type="datetimeFigureOut">
               <a:rPr lang="en-US" smtClean="0"/>
-              <a:t>5/7/26</a:t>
+              <a:t>5/12/26</a:t>
             </a:fld>
             <a:endParaRPr lang="en-US"/>
           </a:p>
@@ -5289,7 +5289,7 @@
           <a:p>
             <a:fld id="{72345051-2045-45DA-935E-2E3CA1A69ADC}" type="datetimeFigureOut">
               <a:rPr lang="en-US" smtClean="0"/>
-              <a:t>5/7/26</a:t>
+              <a:t>5/12/26</a:t>
             </a:fld>
             <a:endParaRPr lang="en-US"/>
           </a:p>
@@ -5431,7 +5431,7 @@
           <a:p>
             <a:fld id="{72345051-2045-45DA-935E-2E3CA1A69ADC}" type="datetimeFigureOut">
               <a:rPr lang="en-US" smtClean="0"/>
-              <a:t>5/7/26</a:t>
+              <a:t>5/12/26</a:t>
             </a:fld>
             <a:endParaRPr lang="en-US"/>
           </a:p>
@@ -5544,7 +5544,7 @@
           <a:p>
             <a:fld id="{72345051-2045-45DA-935E-2E3CA1A69ADC}" type="datetimeFigureOut">
               <a:rPr lang="en-US" smtClean="0"/>
-              <a:t>5/7/26</a:t>
+              <a:t>5/12/26</a:t>
             </a:fld>
             <a:endParaRPr lang="en-US"/>
           </a:p>
@@ -5857,7 +5857,7 @@
           <a:p>
             <a:fld id="{72345051-2045-45DA-935E-2E3CA1A69ADC}" type="datetimeFigureOut">
               <a:rPr lang="en-US" smtClean="0"/>
-              <a:t>5/7/26</a:t>
+              <a:t>5/12/26</a:t>
             </a:fld>
             <a:endParaRPr lang="en-US"/>
           </a:p>
@@ -6146,7 +6146,7 @@
           <a:p>
             <a:fld id="{72345051-2045-45DA-935E-2E3CA1A69ADC}" type="datetimeFigureOut">
               <a:rPr lang="en-US" smtClean="0"/>
-              <a:t>5/7/26</a:t>
+              <a:t>5/12/26</a:t>
             </a:fld>
             <a:endParaRPr lang="en-US"/>
           </a:p>
@@ -6389,7 +6389,7 @@
           <a:p>
             <a:fld id="{72345051-2045-45DA-935E-2E3CA1A69ADC}" type="datetimeFigureOut">
               <a:rPr lang="en-US" smtClean="0"/>
-              <a:t>5/7/26</a:t>
+              <a:t>5/12/26</a:t>
             </a:fld>
             <a:endParaRPr lang="en-US" dirty="0"/>
           </a:p>
@@ -7574,7 +7574,7 @@
               <a:buNone/>
             </a:pPr>
             <a:r>
-              <a:rPr sz="1800" b="0" i="0"/>
+              <a:rPr sz="1800" b="0" i="0" dirty="0"/>
               <a:t>Robotics integrates sensing, computation, and actuation to build machines that interact with the physical world.</a:t>
             </a:r>
           </a:p>
@@ -7588,7 +7588,7 @@
               </a:spcAft>
             </a:pPr>
             <a:r>
-              <a:rPr sz="1800" b="1" i="0"/>
+              <a:rPr sz="1800" b="1" i="0" dirty="0"/>
               <a:t>In Human-Robot Interaction (HRI):</a:t>
             </a:r>
           </a:p>
@@ -7599,8 +7599,16 @@
               </a:spcAft>
             </a:pPr>
             <a:r>
-              <a:rPr sz="1600" b="0" i="0"/>
-              <a:t>Surface EMG (sEMG) signals from forearm muscles enable intuitive, non-invasive control of prosthetic hands and robotic manipulators.</a:t>
+              <a:rPr sz="1600" b="0" i="0" dirty="0"/>
+              <a:t>Surface EMG (</a:t>
+            </a:r>
+            <a:r>
+              <a:rPr sz="1600" b="0" i="0" dirty="0" err="1"/>
+              <a:t>sEMG</a:t>
+            </a:r>
+            <a:r>
+              <a:rPr sz="1600" b="0" i="0" dirty="0"/>
+              <a:t>) signals from forearm muscles enable intuitive, non-invasive control of prosthetic hands and robotic manipulators.</a:t>
             </a:r>
           </a:p>
           <a:p>
@@ -7610,7 +7618,7 @@
               </a:spcAft>
             </a:pPr>
             <a:r>
-              <a:rPr sz="1600" b="0" i="0"/>
+              <a:rPr sz="1600" b="0" i="0" dirty="0"/>
               <a:t>A user simply performs a hand gesture → muscles generate electrical signals → EMG electrodes capture them → a machine learning classifier decodes the gesture → the robot responds.</a:t>
             </a:r>
           </a:p>
@@ -7624,7 +7632,7 @@
               </a:spcAft>
             </a:pPr>
             <a:r>
-              <a:rPr sz="1800" b="1" i="0"/>
+              <a:rPr sz="1800" b="1" i="0" dirty="0"/>
               <a:t>Goal of this project:</a:t>
             </a:r>
           </a:p>
@@ -7635,8 +7643,16 @@
               </a:spcAft>
             </a:pPr>
             <a:r>
-              <a:rPr sz="1600" b="0" i="0"/>
-              <a:t>Build a cross-subject deep learning model that accurately classifies 5 hand gestures from 12-channel sEMG signals, generalizing to unseen subjects.</a:t>
+              <a:rPr sz="1600" b="0" i="0" dirty="0"/>
+              <a:t>Build a cross-subject deep learning model that accurately classifies 5 hand gestures from 12-channel </a:t>
+            </a:r>
+            <a:r>
+              <a:rPr sz="1600" b="0" i="0" dirty="0" err="1"/>
+              <a:t>sEMG</a:t>
+            </a:r>
+            <a:r>
+              <a:rPr sz="1600" b="0" i="0" dirty="0"/>
+              <a:t> signals, generalizing to unseen subjects.</a:t>
             </a:r>
           </a:p>
         </p:txBody>
@@ -7791,8 +7807,16 @@
               <a:buNone/>
             </a:pPr>
             <a:r>
-              <a:rPr sz="1800" b="0" i="0"/>
-              <a:t>Surface Electromyography (sEMG) measures the electrical activity produced by skeletal muscles via non-invasive electrodes placed on the skin.</a:t>
+              <a:rPr sz="1800" b="0" i="0" dirty="0"/>
+              <a:t>Surface Electromyography (</a:t>
+            </a:r>
+            <a:r>
+              <a:rPr sz="1800" b="0" i="0" dirty="0" err="1"/>
+              <a:t>sEMG</a:t>
+            </a:r>
+            <a:r>
+              <a:rPr sz="1800" b="0" i="0" dirty="0"/>
+              <a:t>) measures the electrical activity produced by skeletal muscles via non-invasive electrodes placed on the skin.</a:t>
             </a:r>
           </a:p>
           <a:p>
@@ -7805,7 +7829,7 @@
               </a:spcAft>
             </a:pPr>
             <a:r>
-              <a:rPr sz="1800" b="1" i="0"/>
+              <a:rPr sz="1800" b="1" i="0" dirty="0"/>
               <a:t>Setup in this project:</a:t>
             </a:r>
           </a:p>
@@ -7816,8 +7840,24 @@
               </a:spcAft>
             </a:pPr>
             <a:r>
-              <a:rPr sz="1600" b="0" i="0"/>
-              <a:t>12-channel Delsys Trigno electrodes placed around the forearm</a:t>
+              <a:rPr sz="1600" b="0" i="0" dirty="0"/>
+              <a:t>12-channel </a:t>
+            </a:r>
+            <a:r>
+              <a:rPr sz="1600" b="0" i="0" dirty="0" err="1"/>
+              <a:t>Delsys</a:t>
+            </a:r>
+            <a:r>
+              <a:rPr sz="1600" b="0" i="0" dirty="0"/>
+              <a:t> </a:t>
+            </a:r>
+            <a:r>
+              <a:rPr sz="1600" b="0" i="0" dirty="0" err="1"/>
+              <a:t>Trigno</a:t>
+            </a:r>
+            <a:r>
+              <a:rPr sz="1600" b="0" i="0" dirty="0"/>
+              <a:t> electrodes placed around the forearm</a:t>
             </a:r>
           </a:p>
           <a:p>
@@ -7827,7 +7867,7 @@
               </a:spcAft>
             </a:pPr>
             <a:r>
-              <a:rPr sz="1600" b="0" i="0"/>
+              <a:rPr sz="1600" b="0" i="0" dirty="0"/>
               <a:t>Sampling rate: 2000 Hz — captures fine temporal muscle activation patterns</a:t>
             </a:r>
           </a:p>
@@ -7838,7 +7878,7 @@
               </a:spcAft>
             </a:pPr>
             <a:r>
-              <a:rPr sz="1600" b="0" i="0"/>
+              <a:rPr sz="1600" b="0" i="0" dirty="0"/>
               <a:t>Each channel records a spatial view of muscle activation</a:t>
             </a:r>
           </a:p>
@@ -7852,7 +7892,7 @@
               </a:spcAft>
             </a:pPr>
             <a:r>
-              <a:rPr sz="1800" b="1" i="0"/>
+              <a:rPr sz="1800" b="1" i="0" dirty="0"/>
               <a:t>Preprocessing pipeline:</a:t>
             </a:r>
           </a:p>
@@ -7863,7 +7903,7 @@
               </a:spcAft>
             </a:pPr>
             <a:r>
-              <a:rPr sz="1600" b="0" i="0"/>
+              <a:rPr sz="1600" b="0" i="0" dirty="0"/>
               <a:t>1. Bandpass filter (20–450 Hz) — removes motion artifacts &amp; high-frequency noise</a:t>
             </a:r>
           </a:p>
@@ -7874,7 +7914,7 @@
               </a:spcAft>
             </a:pPr>
             <a:r>
-              <a:rPr sz="1600" b="0" i="0"/>
+              <a:rPr sz="1600" b="0" i="0" dirty="0"/>
               <a:t>2. Notch filter (50 Hz) — removes powerline interference</a:t>
             </a:r>
           </a:p>
@@ -7885,7 +7925,7 @@
               </a:spcAft>
             </a:pPr>
             <a:r>
-              <a:rPr sz="1600" b="0" i="0"/>
+              <a:rPr sz="1600" b="0" i="0" dirty="0"/>
               <a:t>3. Per-subject Z-score normalization — prevents data leakage across subjects</a:t>
             </a:r>
           </a:p>
@@ -8183,7 +8223,7 @@
             </a:pPr>
             <a:r>
               <a:rPr sz="1700" b="0" i="1" dirty="0"/>
-              <a:t>Total trainable parameters: ~647K — compact by design to avoid overfitting on small EMG data.</a:t>
+              <a:t>Total trainable parameters: ~647K.</a:t>
             </a:r>
           </a:p>
         </p:txBody>
@@ -8204,7 +8244,7 @@
         </p:blipFill>
         <p:spPr>
           <a:xfrm>
-            <a:off x="7017744" y="1690688"/>
+            <a:off x="7109184" y="1690688"/>
             <a:ext cx="4937760" cy="3291840"/>
           </a:xfrm>
           <a:prstGeom prst="rect">
@@ -8339,7 +8379,15 @@
             </a:pPr>
             <a:r>
               <a:rPr sz="1600" b="0" i="0" dirty="0"/>
-              <a:t>Only 40 subjects &amp; 5 classes — complex models (e.g., Vision Transformers) would overfit severely.</a:t>
+              <a:t>Only 40 subjects &amp; 5 classes — complex models (e.g., Transformers) would overfit </a:t>
+            </a:r>
+            <a:r>
+              <a:rPr lang="en-US" sz="1600" b="0" i="0" dirty="0"/>
+              <a:t>easily</a:t>
+            </a:r>
+            <a:r>
+              <a:rPr sz="1600" b="0" i="0" dirty="0"/>
+              <a:t>.</a:t>
             </a:r>
           </a:p>
           <a:p>
@@ -9145,8 +9193,8 @@
         </p:blipFill>
         <p:spPr>
           <a:xfrm>
-            <a:off x="7772400" y="1971675"/>
-            <a:ext cx="3931920" cy="2457450"/>
+            <a:off x="6702552" y="1520507"/>
+            <a:ext cx="5065776" cy="3166110"/>
           </a:xfrm>
           <a:prstGeom prst="rect">
             <a:avLst/>

--- a/CS618-Data-Efficient-Learning-Mohammed_Alanazi.pptx
+++ b/CS618-Data-Efficient-Learning-Mohammed_Alanazi.pptx
@@ -12,9 +12,9 @@
     <p:sldId id="257" r:id="rId3"/>
     <p:sldId id="258" r:id="rId4"/>
     <p:sldId id="259" r:id="rId5"/>
-    <p:sldId id="260" r:id="rId6"/>
+    <p:sldId id="263" r:id="rId6"/>
     <p:sldId id="261" r:id="rId7"/>
-    <p:sldId id="263" r:id="rId8"/>
+    <p:sldId id="260" r:id="rId8"/>
     <p:sldId id="264" r:id="rId9"/>
     <p:sldId id="265" r:id="rId10"/>
     <p:sldId id="266" r:id="rId11"/>
@@ -7393,6 +7393,19 @@
               <a:rPr sz="3200" b="1" dirty="0"/>
               <a:t>Methodology</a:t>
             </a:r>
+            <a:endParaRPr lang="en-US" sz="3200" b="1" dirty="0"/>
+          </a:p>
+          <a:p>
+            <a:pPr>
+              <a:spcAft>
+                <a:spcPts val="400"/>
+              </a:spcAft>
+            </a:pPr>
+            <a:r>
+              <a:rPr lang="en-US" sz="2400" dirty="0"/>
+              <a:t>Dataset</a:t>
+            </a:r>
+            <a:endParaRPr sz="2400" dirty="0"/>
           </a:p>
           <a:p>
             <a:pPr algn="l">
@@ -7401,8 +7414,32 @@
               </a:spcAft>
             </a:pPr>
             <a:r>
+              <a:rPr sz="2400" b="0" dirty="0"/>
+              <a:t>Why </a:t>
+            </a:r>
+            <a:r>
               <a:rPr sz="2400" b="0" dirty="0" err="1"/>
               <a:t>ResCNN</a:t>
+            </a:r>
+            <a:r>
+              <a:rPr sz="2400" b="0" dirty="0"/>
+              <a:t> and Segment-Level Majority Voting</a:t>
+            </a:r>
+            <a:endParaRPr lang="en-US" sz="2400" b="0" dirty="0"/>
+          </a:p>
+          <a:p>
+            <a:pPr>
+              <a:spcAft>
+                <a:spcPts val="400"/>
+              </a:spcAft>
+            </a:pPr>
+            <a:r>
+              <a:rPr lang="en-US" sz="2400" dirty="0" err="1"/>
+              <a:t>ResCNN</a:t>
+            </a:r>
+            <a:r>
+              <a:rPr lang="en-US" sz="2400" dirty="0"/>
+              <a:t> Architecture</a:t>
             </a:r>
             <a:endParaRPr sz="2400" b="0" dirty="0"/>
           </a:p>
@@ -7413,38 +7450,8 @@
               </a:spcAft>
             </a:pPr>
             <a:r>
-              <a:rPr sz="2400" b="0" dirty="0"/>
-              <a:t>Why </a:t>
-            </a:r>
-            <a:r>
-              <a:rPr sz="2400" b="0" dirty="0" err="1"/>
-              <a:t>ResCNN</a:t>
-            </a:r>
-            <a:r>
-              <a:rPr sz="2400" b="0" dirty="0"/>
-              <a:t> and Segment-Level Majority Voting</a:t>
-            </a:r>
-          </a:p>
-          <a:p>
-            <a:pPr algn="l">
-              <a:spcAft>
-                <a:spcPts val="400"/>
-              </a:spcAft>
-            </a:pPr>
-            <a:r>
               <a:rPr sz="3200" b="1" dirty="0"/>
               <a:t>Experimental Results</a:t>
-            </a:r>
-          </a:p>
-          <a:p>
-            <a:pPr algn="l">
-              <a:spcAft>
-                <a:spcPts val="400"/>
-              </a:spcAft>
-            </a:pPr>
-            <a:r>
-              <a:rPr sz="2400" b="0" dirty="0"/>
-              <a:t>Dataset</a:t>
             </a:r>
           </a:p>
           <a:p>
@@ -7990,7 +7997,7 @@
           <p:cNvPr id="2" name="Title 1">
             <a:extLst>
               <a:ext uri="{FF2B5EF4-FFF2-40B4-BE49-F238E27FC236}">
-                <a16:creationId xmlns:a16="http://schemas.microsoft.com/office/drawing/2014/main" id="{FB822C96-8A99-0A0B-91D7-46E9A110D7C1}"/>
+                <a16:creationId xmlns:a16="http://schemas.microsoft.com/office/drawing/2014/main" id="{64BEACB1-4465-5C20-4B17-0CD5F33950D3}"/>
               </a:ext>
             </a:extLst>
           </p:cNvPr>
@@ -8010,561 +8017,23 @@
           <a:p>
             <a:pPr algn="l"/>
             <a:r>
-              <a:rPr sz="4000" b="1"/>
+              <a:rPr sz="4000" b="1" dirty="0"/>
               <a:t>Methodology</a:t>
             </a:r>
-            <a:endParaRPr lang="en-SA" sz="2800" dirty="0"/>
           </a:p>
           <a:p>
             <a:pPr algn="l"/>
             <a:r>
               <a:rPr sz="2800" b="0"/>
-              <a:t>ResCNN Architecture</a:t>
-            </a:r>
-          </a:p>
-        </p:txBody>
-      </p:sp>
-      <p:sp>
-        <p:nvSpPr>
-          <p:cNvPr id="3" name="Content Placeholder 2">
-            <a:extLst>
-              <a:ext uri="{FF2B5EF4-FFF2-40B4-BE49-F238E27FC236}">
-                <a16:creationId xmlns:a16="http://schemas.microsoft.com/office/drawing/2014/main" id="{E1A92292-E5FC-01C2-C5CE-951898939569}"/>
-              </a:ext>
-            </a:extLst>
-          </p:cNvPr>
-          <p:cNvSpPr>
-            <a:spLocks noGrp="1"/>
-          </p:cNvSpPr>
-          <p:nvPr>
-            <p:ph idx="1"/>
-          </p:nvPr>
-        </p:nvSpPr>
-        <p:spPr>
-          <a:xfrm>
-            <a:off x="363557" y="1690688"/>
-            <a:ext cx="6830457" cy="3850797"/>
-          </a:xfrm>
-        </p:spPr>
-        <p:txBody>
-          <a:bodyPr>
-            <a:normAutofit fontScale="70000" lnSpcReduction="20000"/>
-          </a:bodyPr>
-          <a:lstStyle/>
-          <a:p>
-            <a:pPr marL="0" indent="0" algn="l">
-              <a:spcAft>
-                <a:spcPts val="600"/>
-              </a:spcAft>
-              <a:buNone/>
-            </a:pPr>
-            <a:r>
-              <a:rPr sz="2600" b="1" i="0" dirty="0"/>
-              <a:t>System Pipeline:</a:t>
-            </a:r>
-          </a:p>
-          <a:p>
-            <a:pPr algn="l">
-              <a:spcAft>
-                <a:spcPts val="600"/>
-              </a:spcAft>
-            </a:pPr>
-            <a:r>
-              <a:rPr sz="2200" b="0" i="1" dirty="0"/>
-              <a:t>Raw EMG (12ch) → Bandpass + Notch → Z-score Norm → Sliding Windows (200pt, step=50) → </a:t>
-            </a:r>
-            <a:r>
-              <a:rPr sz="2200" b="0" i="1" dirty="0" err="1"/>
-              <a:t>ResCNN</a:t>
-            </a:r>
-            <a:r>
-              <a:rPr sz="2200" b="0" i="1" dirty="0"/>
-              <a:t> → </a:t>
-            </a:r>
-            <a:r>
-              <a:rPr sz="2200" b="0" i="1" dirty="0" err="1"/>
-              <a:t>Softmax</a:t>
-            </a:r>
-            <a:r>
-              <a:rPr sz="2200" b="0" i="1" dirty="0"/>
-              <a:t> → Majority Voting → Gesture Prediction</a:t>
-            </a:r>
-          </a:p>
-          <a:p>
-            <a:pPr marL="0" indent="0" algn="l">
-              <a:spcBef>
-                <a:spcPts val="1200"/>
-              </a:spcBef>
-              <a:spcAft>
-                <a:spcPts val="600"/>
-              </a:spcAft>
-              <a:buNone/>
-            </a:pPr>
-            <a:r>
-              <a:rPr sz="2600" b="1" i="0" dirty="0" err="1"/>
-              <a:t>ResCNN</a:t>
-            </a:r>
-            <a:r>
-              <a:rPr sz="2600" b="1" i="0" dirty="0"/>
-              <a:t> Design (3 Residual Blocks):</a:t>
-            </a:r>
-          </a:p>
-          <a:p>
-            <a:pPr>
-              <a:spcAft>
-                <a:spcPts val="600"/>
-              </a:spcAft>
-            </a:pPr>
-            <a:r>
-              <a:rPr sz="1700" b="0" i="0" dirty="0"/>
-              <a:t>Stem: Conv1d(12→64, k=15) → </a:t>
-            </a:r>
-            <a:r>
-              <a:rPr sz="1700" b="0" i="0" dirty="0" err="1"/>
-              <a:t>BatchNorm</a:t>
-            </a:r>
-            <a:r>
-              <a:rPr sz="1700" b="0" i="0" dirty="0"/>
-              <a:t> → GELU → </a:t>
-            </a:r>
-            <a:r>
-              <a:rPr sz="1700" b="0" i="0" dirty="0" err="1"/>
-              <a:t>MaxPool</a:t>
-            </a:r>
-            <a:r>
-              <a:rPr sz="1700" b="0" i="0" dirty="0"/>
-              <a:t>(2)</a:t>
-            </a:r>
-          </a:p>
-          <a:p>
-            <a:pPr>
-              <a:spcAft>
-                <a:spcPts val="600"/>
-              </a:spcAft>
-            </a:pPr>
-            <a:r>
-              <a:rPr sz="1700" b="0" i="0" dirty="0"/>
-              <a:t>Block 1: Conv(64→64, k=15) → BN → GELU → Conv(64→64) → BN → GELU → shortcut → </a:t>
-            </a:r>
-            <a:r>
-              <a:rPr sz="1700" b="0" i="0" dirty="0" err="1"/>
-              <a:t>MaxPool</a:t>
-            </a:r>
-            <a:r>
-              <a:rPr sz="1700" b="0" i="0" dirty="0"/>
-              <a:t>(2)</a:t>
-            </a:r>
-          </a:p>
-          <a:p>
-            <a:pPr>
-              <a:spcAft>
-                <a:spcPts val="600"/>
-              </a:spcAft>
-            </a:pPr>
-            <a:r>
-              <a:rPr sz="1700" b="0" i="0" dirty="0"/>
-              <a:t>Block 2: Conv(64→128, k=7) → BN → GELU → Conv(128→128) → BN → GELU → shortcut → </a:t>
-            </a:r>
-            <a:r>
-              <a:rPr sz="1700" b="0" i="0" dirty="0" err="1"/>
-              <a:t>MaxPool</a:t>
-            </a:r>
-            <a:r>
-              <a:rPr sz="1700" b="0" i="0" dirty="0"/>
-              <a:t>(2)</a:t>
-            </a:r>
-          </a:p>
-          <a:p>
-            <a:pPr>
-              <a:spcAft>
-                <a:spcPts val="600"/>
-              </a:spcAft>
-            </a:pPr>
-            <a:r>
-              <a:rPr sz="1700" b="0" i="0" dirty="0"/>
-              <a:t>Block 3: Conv(128→256, k=3) → BN → GELU → Conv(256→256) → BN → GELU → shortcut → </a:t>
-            </a:r>
-            <a:r>
-              <a:rPr sz="1700" b="0" i="0" dirty="0" err="1"/>
-              <a:t>MaxPool</a:t>
-            </a:r>
-            <a:r>
-              <a:rPr sz="1700" b="0" i="0" dirty="0"/>
-              <a:t>(2)</a:t>
-            </a:r>
-          </a:p>
-          <a:p>
-            <a:pPr>
-              <a:spcAft>
-                <a:spcPts val="600"/>
-              </a:spcAft>
-            </a:pPr>
-            <a:r>
-              <a:rPr sz="1700" b="0" i="0" dirty="0"/>
-              <a:t>Head: </a:t>
-            </a:r>
-            <a:r>
-              <a:rPr sz="1700" b="0" i="0" dirty="0" err="1"/>
-              <a:t>AdaptiveAvgPool</a:t>
-            </a:r>
-            <a:r>
-              <a:rPr sz="1700" b="0" i="0" dirty="0"/>
-              <a:t>(1) → Dropout(0.5) → Linear(256→5)</a:t>
-            </a:r>
-          </a:p>
-          <a:p>
-            <a:pPr>
-              <a:spcBef>
-                <a:spcPts val="800"/>
-              </a:spcBef>
-              <a:spcAft>
-                <a:spcPts val="600"/>
-              </a:spcAft>
-            </a:pPr>
-            <a:r>
-              <a:rPr sz="1700" b="0" i="1" dirty="0"/>
-              <a:t>Total trainable parameters: ~647K.</a:t>
-            </a:r>
-          </a:p>
-        </p:txBody>
-      </p:sp>
-      <p:pic>
-        <p:nvPicPr>
-          <p:cNvPr id="4" name="Picture 3" descr="image.png"/>
-          <p:cNvPicPr>
-            <a:picLocks noChangeAspect="1"/>
-          </p:cNvPicPr>
-          <p:nvPr/>
-        </p:nvPicPr>
-        <p:blipFill>
-          <a:blip r:embed="rId2"/>
-          <a:stretch>
-            <a:fillRect/>
-          </a:stretch>
-        </p:blipFill>
-        <p:spPr>
-          <a:xfrm>
-            <a:off x="7109184" y="1690688"/>
-            <a:ext cx="4937760" cy="3291840"/>
-          </a:xfrm>
-          <a:prstGeom prst="rect">
-            <a:avLst/>
-          </a:prstGeom>
-        </p:spPr>
-      </p:pic>
-    </p:spTree>
-    <p:extLst>
-      <p:ext uri="{BB962C8B-B14F-4D97-AF65-F5344CB8AC3E}">
-        <p14:creationId xmlns:p14="http://schemas.microsoft.com/office/powerpoint/2010/main" val="3286206870"/>
-      </p:ext>
-    </p:extLst>
-  </p:cSld>
-  <p:clrMapOvr>
-    <a:masterClrMapping/>
-  </p:clrMapOvr>
-</p:sld>
-</file>
-
-<file path=ppt/slides/slide6.xml><?xml version="1.0" encoding="utf-8"?>
-<p:sld xmlns:a="http://schemas.openxmlformats.org/drawingml/2006/main" xmlns:r="http://schemas.openxmlformats.org/officeDocument/2006/relationships" xmlns:p="http://schemas.openxmlformats.org/presentationml/2006/main">
-  <p:cSld>
-    <p:spTree>
-      <p:nvGrpSpPr>
-        <p:cNvPr id="1" name=""/>
-        <p:cNvGrpSpPr/>
-        <p:nvPr/>
-      </p:nvGrpSpPr>
-      <p:grpSpPr>
-        <a:xfrm>
-          <a:off x="0" y="0"/>
-          <a:ext cx="0" cy="0"/>
-          <a:chOff x="0" y="0"/>
-          <a:chExt cx="0" cy="0"/>
-        </a:xfrm>
-      </p:grpSpPr>
-      <p:sp>
-        <p:nvSpPr>
-          <p:cNvPr id="2" name="Title 1">
-            <a:extLst>
-              <a:ext uri="{FF2B5EF4-FFF2-40B4-BE49-F238E27FC236}">
-                <a16:creationId xmlns:a16="http://schemas.microsoft.com/office/drawing/2014/main" id="{45795039-3484-C41D-7584-0A700A931680}"/>
-              </a:ext>
-            </a:extLst>
-          </p:cNvPr>
-          <p:cNvSpPr>
-            <a:spLocks noGrp="1"/>
-          </p:cNvSpPr>
-          <p:nvPr>
-            <p:ph type="title"/>
-          </p:nvPr>
-        </p:nvSpPr>
-        <p:spPr/>
-        <p:txBody>
-          <a:bodyPr>
-            <a:normAutofit/>
-          </a:bodyPr>
-          <a:lstStyle/>
-          <a:p>
-            <a:pPr algn="l"/>
-            <a:r>
-              <a:rPr sz="4000" b="1"/>
-              <a:t>Methodology</a:t>
-            </a:r>
-          </a:p>
-          <a:p>
-            <a:pPr algn="l"/>
-            <a:r>
-              <a:rPr sz="2800" b="0"/>
-              <a:t>Why ResCNN &amp; Segment-Level Majority Voting</a:t>
-            </a:r>
-          </a:p>
-        </p:txBody>
-      </p:sp>
-      <p:sp>
-        <p:nvSpPr>
-          <p:cNvPr id="3" name="Content Placeholder 2">
-            <a:extLst>
-              <a:ext uri="{FF2B5EF4-FFF2-40B4-BE49-F238E27FC236}">
-                <a16:creationId xmlns:a16="http://schemas.microsoft.com/office/drawing/2014/main" id="{D1DE5B1A-5A2F-A288-F6BA-933505147B08}"/>
-              </a:ext>
-            </a:extLst>
-          </p:cNvPr>
-          <p:cNvSpPr>
-            <a:spLocks noGrp="1"/>
-          </p:cNvSpPr>
-          <p:nvPr>
-            <p:ph idx="1"/>
-          </p:nvPr>
-        </p:nvSpPr>
-        <p:spPr>
-          <a:xfrm>
-            <a:off x="838200" y="1614937"/>
-            <a:ext cx="10515600" cy="2910832"/>
-          </a:xfrm>
-        </p:spPr>
-        <p:txBody>
-          <a:bodyPr>
-            <a:normAutofit fontScale="92500" lnSpcReduction="20000"/>
-          </a:bodyPr>
-          <a:lstStyle/>
-          <a:p>
-            <a:pPr marL="0" indent="0" algn="l">
-              <a:spcAft>
-                <a:spcPts val="600"/>
-              </a:spcAft>
-              <a:buNone/>
-            </a:pPr>
-            <a:r>
-              <a:rPr sz="1800" b="1" i="0" dirty="0"/>
-              <a:t>Why a Simple </a:t>
-            </a:r>
-            <a:r>
-              <a:rPr sz="1800" b="1" i="0" dirty="0" err="1"/>
-              <a:t>ResCNN</a:t>
-            </a:r>
-            <a:r>
-              <a:rPr sz="1800" b="1" i="0" dirty="0"/>
-              <a:t>?</a:t>
-            </a:r>
-            <a:endParaRPr lang="en-SA" dirty="0">
-              <a:latin typeface="Arial" panose="020B0604020202020204" pitchFamily="34" charset="0"/>
-              <a:cs typeface="Arial" panose="020B0604020202020204" pitchFamily="34" charset="0"/>
-            </a:endParaRPr>
-          </a:p>
-          <a:p>
-            <a:pPr algn="l">
-              <a:spcAft>
-                <a:spcPts val="600"/>
-              </a:spcAft>
-            </a:pPr>
-            <a:r>
-              <a:rPr sz="1600" b="0" i="0" dirty="0"/>
-              <a:t>Only 40 subjects &amp; 5 classes — complex models (e.g., Transformers) would overfit </a:t>
-            </a:r>
-            <a:r>
-              <a:rPr lang="en-US" sz="1600" b="0" i="0" dirty="0"/>
-              <a:t>easily</a:t>
-            </a:r>
-            <a:r>
-              <a:rPr sz="1600" b="0" i="0" dirty="0"/>
-              <a:t>.</a:t>
-            </a:r>
-          </a:p>
-          <a:p>
-            <a:pPr algn="l">
-              <a:spcAft>
-                <a:spcPts val="600"/>
-              </a:spcAft>
-            </a:pPr>
-            <a:r>
-              <a:rPr sz="1600" b="0" i="0" dirty="0"/>
-              <a:t>Residual connections allow gradient flow through 3 blocks while </a:t>
-            </a:r>
-            <a:r>
-              <a:rPr sz="1600" b="0" i="0" dirty="0" err="1"/>
-              <a:t>BatchNorm</a:t>
-            </a:r>
-            <a:r>
-              <a:rPr sz="1600" b="0" i="0" dirty="0"/>
-              <a:t> + GELU + Dropout(0.5) provide strong regularization.</a:t>
-            </a:r>
-          </a:p>
-          <a:p>
-            <a:pPr algn="l">
-              <a:spcAft>
-                <a:spcPts val="600"/>
-              </a:spcAft>
-            </a:pPr>
-            <a:r>
-              <a:rPr sz="1600" b="0" i="0" dirty="0"/>
-              <a:t>Data augmentation: Gaussian noise (</a:t>
-            </a:r>
-            <a:r>
-              <a:rPr sz="1600" b="0" i="0" dirty="0" err="1"/>
-              <a:t>σ</a:t>
-            </a:r>
-            <a:r>
-              <a:rPr sz="1600" b="0" i="0" dirty="0"/>
-              <a:t>=0.03), adaptive </a:t>
-            </a:r>
-            <a:r>
-              <a:rPr sz="1600" b="0" i="0" dirty="0" err="1"/>
-              <a:t>Mixup</a:t>
-            </a:r>
-            <a:r>
-              <a:rPr sz="1600" b="0" i="0" dirty="0"/>
-              <a:t> (α=0.25→0.05→0 at epoch 50).</a:t>
-            </a:r>
-          </a:p>
-          <a:p>
-            <a:pPr algn="l">
-              <a:spcBef>
-                <a:spcPts val="1200"/>
-              </a:spcBef>
-              <a:spcAft>
-                <a:spcPts val="600"/>
-              </a:spcAft>
-            </a:pPr>
-            <a:r>
-              <a:rPr sz="1800" b="1" i="0" dirty="0"/>
-              <a:t>Why Majority Voting?</a:t>
-            </a:r>
-          </a:p>
-          <a:p>
-            <a:pPr algn="l">
-              <a:spcAft>
-                <a:spcPts val="600"/>
-              </a:spcAft>
-            </a:pPr>
-            <a:r>
-              <a:rPr sz="1600" b="0" i="0" dirty="0"/>
-              <a:t>Sliding windows overlap by 75% — adjacent windows see the same gesture segment. A single window-level prediction is noisy (~70% acc).</a:t>
-            </a:r>
-          </a:p>
-          <a:p>
-            <a:pPr algn="l">
-              <a:spcBef>
-                <a:spcPts val="800"/>
-              </a:spcBef>
-              <a:spcAft>
-                <a:spcPts val="600"/>
-              </a:spcAft>
-            </a:pPr>
-            <a:r>
-              <a:rPr sz="1600" b="1" i="0" dirty="0"/>
-              <a:t>Result:  ~70% window accuracy → ~90% segment-level accuracy after voting.</a:t>
-            </a:r>
-          </a:p>
-        </p:txBody>
-      </p:sp>
-      <p:pic>
-        <p:nvPicPr>
-          <p:cNvPr id="4" name="Picture 3" descr="image.png"/>
-          <p:cNvPicPr>
-            <a:picLocks noChangeAspect="1"/>
-          </p:cNvPicPr>
-          <p:nvPr/>
-        </p:nvPicPr>
-        <p:blipFill>
-          <a:blip r:embed="rId2"/>
-          <a:stretch>
-            <a:fillRect/>
-          </a:stretch>
-        </p:blipFill>
-        <p:spPr>
-          <a:xfrm>
-            <a:off x="1123720" y="4342482"/>
-            <a:ext cx="9055865" cy="2515518"/>
-          </a:xfrm>
-          <a:prstGeom prst="rect">
-            <a:avLst/>
-          </a:prstGeom>
-        </p:spPr>
-      </p:pic>
-    </p:spTree>
-    <p:extLst>
-      <p:ext uri="{BB962C8B-B14F-4D97-AF65-F5344CB8AC3E}">
-        <p14:creationId xmlns:p14="http://schemas.microsoft.com/office/powerpoint/2010/main" val="1371129126"/>
-      </p:ext>
-    </p:extLst>
-  </p:cSld>
-  <p:clrMapOvr>
-    <a:masterClrMapping/>
-  </p:clrMapOvr>
-</p:sld>
-</file>
-
-<file path=ppt/slides/slide7.xml><?xml version="1.0" encoding="utf-8"?>
-<p:sld xmlns:a="http://schemas.openxmlformats.org/drawingml/2006/main" xmlns:r="http://schemas.openxmlformats.org/officeDocument/2006/relationships" xmlns:p="http://schemas.openxmlformats.org/presentationml/2006/main">
-  <p:cSld>
-    <p:spTree>
-      <p:nvGrpSpPr>
-        <p:cNvPr id="1" name=""/>
-        <p:cNvGrpSpPr/>
-        <p:nvPr/>
-      </p:nvGrpSpPr>
-      <p:grpSpPr>
-        <a:xfrm>
-          <a:off x="0" y="0"/>
-          <a:ext cx="0" cy="0"/>
-          <a:chOff x="0" y="0"/>
-          <a:chExt cx="0" cy="0"/>
-        </a:xfrm>
-      </p:grpSpPr>
-      <p:sp>
-        <p:nvSpPr>
-          <p:cNvPr id="2" name="Title 1">
-            <a:extLst>
-              <a:ext uri="{FF2B5EF4-FFF2-40B4-BE49-F238E27FC236}">
-                <a16:creationId xmlns:a16="http://schemas.microsoft.com/office/drawing/2014/main" id="{64BEACB1-4465-5C20-4B17-0CD5F33950D3}"/>
-              </a:ext>
-            </a:extLst>
-          </p:cNvPr>
-          <p:cNvSpPr>
-            <a:spLocks noGrp="1"/>
-          </p:cNvSpPr>
-          <p:nvPr>
-            <p:ph type="title"/>
-          </p:nvPr>
-        </p:nvSpPr>
-        <p:spPr/>
-        <p:txBody>
-          <a:bodyPr>
-            <a:normAutofit/>
-          </a:bodyPr>
-          <a:lstStyle/>
-          <a:p>
-            <a:pPr algn="l"/>
-            <a:r>
-              <a:rPr sz="4000" b="1"/>
-              <a:t>Methodology</a:t>
-            </a:r>
-          </a:p>
-          <a:p>
-            <a:pPr algn="l"/>
-            <a:r>
-              <a:rPr sz="2800" b="0"/>
-              <a:t>Dataset — NinaPro DB2</a:t>
+              <a:t>Dataset — </a:t>
+            </a:r>
+            <a:r>
+              <a:rPr sz="2800" b="0" dirty="0" err="1"/>
+              <a:t>NinaPro</a:t>
+            </a:r>
+            <a:r>
+              <a:rPr sz="2800" b="0" dirty="0"/>
+              <a:t> DB2</a:t>
             </a:r>
           </a:p>
         </p:txBody>
@@ -9214,6 +8683,568 @@
 </p:sld>
 </file>
 
+<file path=ppt/slides/slide6.xml><?xml version="1.0" encoding="utf-8"?>
+<p:sld xmlns:a="http://schemas.openxmlformats.org/drawingml/2006/main" xmlns:r="http://schemas.openxmlformats.org/officeDocument/2006/relationships" xmlns:p="http://schemas.openxmlformats.org/presentationml/2006/main">
+  <p:cSld>
+    <p:spTree>
+      <p:nvGrpSpPr>
+        <p:cNvPr id="1" name=""/>
+        <p:cNvGrpSpPr/>
+        <p:nvPr/>
+      </p:nvGrpSpPr>
+      <p:grpSpPr>
+        <a:xfrm>
+          <a:off x="0" y="0"/>
+          <a:ext cx="0" cy="0"/>
+          <a:chOff x="0" y="0"/>
+          <a:chExt cx="0" cy="0"/>
+        </a:xfrm>
+      </p:grpSpPr>
+      <p:sp>
+        <p:nvSpPr>
+          <p:cNvPr id="2" name="Title 1">
+            <a:extLst>
+              <a:ext uri="{FF2B5EF4-FFF2-40B4-BE49-F238E27FC236}">
+                <a16:creationId xmlns:a16="http://schemas.microsoft.com/office/drawing/2014/main" id="{45795039-3484-C41D-7584-0A700A931680}"/>
+              </a:ext>
+            </a:extLst>
+          </p:cNvPr>
+          <p:cNvSpPr>
+            <a:spLocks noGrp="1"/>
+          </p:cNvSpPr>
+          <p:nvPr>
+            <p:ph type="title"/>
+          </p:nvPr>
+        </p:nvSpPr>
+        <p:spPr/>
+        <p:txBody>
+          <a:bodyPr>
+            <a:normAutofit/>
+          </a:bodyPr>
+          <a:lstStyle/>
+          <a:p>
+            <a:pPr algn="l"/>
+            <a:r>
+              <a:rPr sz="4000" b="1" dirty="0"/>
+              <a:t>Methodology</a:t>
+            </a:r>
+          </a:p>
+          <a:p>
+            <a:pPr algn="l"/>
+            <a:r>
+              <a:rPr sz="2800" b="0" dirty="0"/>
+              <a:t>Why </a:t>
+            </a:r>
+            <a:r>
+              <a:rPr sz="2800" b="0" dirty="0" err="1"/>
+              <a:t>ResCNN</a:t>
+            </a:r>
+            <a:r>
+              <a:rPr sz="2800" b="0" dirty="0"/>
+              <a:t> &amp; Segment-Level Majority Voting</a:t>
+            </a:r>
+          </a:p>
+        </p:txBody>
+      </p:sp>
+      <p:sp>
+        <p:nvSpPr>
+          <p:cNvPr id="3" name="Content Placeholder 2">
+            <a:extLst>
+              <a:ext uri="{FF2B5EF4-FFF2-40B4-BE49-F238E27FC236}">
+                <a16:creationId xmlns:a16="http://schemas.microsoft.com/office/drawing/2014/main" id="{D1DE5B1A-5A2F-A288-F6BA-933505147B08}"/>
+              </a:ext>
+            </a:extLst>
+          </p:cNvPr>
+          <p:cNvSpPr>
+            <a:spLocks noGrp="1"/>
+          </p:cNvSpPr>
+          <p:nvPr>
+            <p:ph idx="1"/>
+          </p:nvPr>
+        </p:nvSpPr>
+        <p:spPr>
+          <a:xfrm>
+            <a:off x="838200" y="1614937"/>
+            <a:ext cx="10515600" cy="2910832"/>
+          </a:xfrm>
+        </p:spPr>
+        <p:txBody>
+          <a:bodyPr>
+            <a:normAutofit fontScale="92500" lnSpcReduction="20000"/>
+          </a:bodyPr>
+          <a:lstStyle/>
+          <a:p>
+            <a:pPr marL="0" indent="0" algn="l">
+              <a:spcAft>
+                <a:spcPts val="600"/>
+              </a:spcAft>
+              <a:buNone/>
+            </a:pPr>
+            <a:r>
+              <a:rPr sz="1800" b="1" i="0" dirty="0"/>
+              <a:t>Why a Simple </a:t>
+            </a:r>
+            <a:r>
+              <a:rPr sz="1800" b="1" i="0" dirty="0" err="1"/>
+              <a:t>ResCNN</a:t>
+            </a:r>
+            <a:r>
+              <a:rPr sz="1800" b="1" i="0" dirty="0"/>
+              <a:t>?</a:t>
+            </a:r>
+            <a:endParaRPr lang="en-SA" dirty="0">
+              <a:latin typeface="Arial" panose="020B0604020202020204" pitchFamily="34" charset="0"/>
+              <a:cs typeface="Arial" panose="020B0604020202020204" pitchFamily="34" charset="0"/>
+            </a:endParaRPr>
+          </a:p>
+          <a:p>
+            <a:pPr algn="l">
+              <a:spcAft>
+                <a:spcPts val="600"/>
+              </a:spcAft>
+            </a:pPr>
+            <a:r>
+              <a:rPr sz="1600" b="0" i="0" dirty="0"/>
+              <a:t>Only 40 subjects &amp; 5 classes — complex models (e.g., Transformers</a:t>
+            </a:r>
+            <a:r>
+              <a:rPr lang="en-US" sz="1600" b="0" i="0" dirty="0"/>
+              <a:t>, GAN</a:t>
+            </a:r>
+            <a:r>
+              <a:rPr sz="1600" b="0" i="0" dirty="0"/>
+              <a:t>) would overfit </a:t>
+            </a:r>
+            <a:r>
+              <a:rPr lang="en-US" sz="1600" b="0" i="0" dirty="0"/>
+              <a:t>easily</a:t>
+            </a:r>
+            <a:r>
+              <a:rPr sz="1600" b="0" i="0" dirty="0"/>
+              <a:t>.</a:t>
+            </a:r>
+          </a:p>
+          <a:p>
+            <a:pPr algn="l">
+              <a:spcAft>
+                <a:spcPts val="600"/>
+              </a:spcAft>
+            </a:pPr>
+            <a:r>
+              <a:rPr sz="1600" b="0" i="0" dirty="0"/>
+              <a:t>Residual connections allow gradient flow through 3 blocks while </a:t>
+            </a:r>
+            <a:r>
+              <a:rPr sz="1600" b="0" i="0" dirty="0" err="1"/>
+              <a:t>BatchNorm</a:t>
+            </a:r>
+            <a:r>
+              <a:rPr sz="1600" b="0" i="0" dirty="0"/>
+              <a:t> + GELU + Dropout(0.5) provide strong regularization.</a:t>
+            </a:r>
+          </a:p>
+          <a:p>
+            <a:pPr algn="l">
+              <a:spcAft>
+                <a:spcPts val="600"/>
+              </a:spcAft>
+            </a:pPr>
+            <a:r>
+              <a:rPr sz="1600" b="0" i="0" dirty="0"/>
+              <a:t>Data augmentation: Gaussian noise (</a:t>
+            </a:r>
+            <a:r>
+              <a:rPr sz="1600" b="0" i="0" dirty="0" err="1"/>
+              <a:t>σ</a:t>
+            </a:r>
+            <a:r>
+              <a:rPr sz="1600" b="0" i="0" dirty="0"/>
+              <a:t>=0.03), adaptive </a:t>
+            </a:r>
+            <a:r>
+              <a:rPr sz="1600" b="0" i="0" dirty="0" err="1"/>
+              <a:t>Mixup</a:t>
+            </a:r>
+            <a:r>
+              <a:rPr sz="1600" b="0" i="0" dirty="0"/>
+              <a:t> (α=0.25→0.05→0 at epoch 50).</a:t>
+            </a:r>
+          </a:p>
+          <a:p>
+            <a:pPr algn="l">
+              <a:spcBef>
+                <a:spcPts val="1200"/>
+              </a:spcBef>
+              <a:spcAft>
+                <a:spcPts val="600"/>
+              </a:spcAft>
+            </a:pPr>
+            <a:r>
+              <a:rPr sz="1800" b="1" i="0" dirty="0"/>
+              <a:t>Why Majority Voting?</a:t>
+            </a:r>
+          </a:p>
+          <a:p>
+            <a:pPr algn="l">
+              <a:spcAft>
+                <a:spcPts val="600"/>
+              </a:spcAft>
+            </a:pPr>
+            <a:r>
+              <a:rPr sz="1600" b="0" i="0" dirty="0"/>
+              <a:t>Sliding windows overlap by 75% — adjacent windows see the same gesture segment. A single window-level prediction is noisy (~70% acc).</a:t>
+            </a:r>
+          </a:p>
+          <a:p>
+            <a:pPr algn="l">
+              <a:spcBef>
+                <a:spcPts val="800"/>
+              </a:spcBef>
+              <a:spcAft>
+                <a:spcPts val="600"/>
+              </a:spcAft>
+            </a:pPr>
+            <a:r>
+              <a:rPr sz="1600" b="1" i="0" dirty="0"/>
+              <a:t>Result:  ~70% window accuracy → ~90% segment-level accuracy after voting.</a:t>
+            </a:r>
+          </a:p>
+        </p:txBody>
+      </p:sp>
+      <p:pic>
+        <p:nvPicPr>
+          <p:cNvPr id="4" name="Picture 3" descr="image.png"/>
+          <p:cNvPicPr>
+            <a:picLocks noChangeAspect="1"/>
+          </p:cNvPicPr>
+          <p:nvPr/>
+        </p:nvPicPr>
+        <p:blipFill>
+          <a:blip r:embed="rId2"/>
+          <a:stretch>
+            <a:fillRect/>
+          </a:stretch>
+        </p:blipFill>
+        <p:spPr>
+          <a:xfrm>
+            <a:off x="1123720" y="4342482"/>
+            <a:ext cx="9055865" cy="2515518"/>
+          </a:xfrm>
+          <a:prstGeom prst="rect">
+            <a:avLst/>
+          </a:prstGeom>
+        </p:spPr>
+      </p:pic>
+    </p:spTree>
+    <p:extLst>
+      <p:ext uri="{BB962C8B-B14F-4D97-AF65-F5344CB8AC3E}">
+        <p14:creationId xmlns:p14="http://schemas.microsoft.com/office/powerpoint/2010/main" val="1371129126"/>
+      </p:ext>
+    </p:extLst>
+  </p:cSld>
+  <p:clrMapOvr>
+    <a:masterClrMapping/>
+  </p:clrMapOvr>
+</p:sld>
+</file>
+
+<file path=ppt/slides/slide7.xml><?xml version="1.0" encoding="utf-8"?>
+<p:sld xmlns:a="http://schemas.openxmlformats.org/drawingml/2006/main" xmlns:r="http://schemas.openxmlformats.org/officeDocument/2006/relationships" xmlns:p="http://schemas.openxmlformats.org/presentationml/2006/main">
+  <p:cSld>
+    <p:spTree>
+      <p:nvGrpSpPr>
+        <p:cNvPr id="1" name=""/>
+        <p:cNvGrpSpPr/>
+        <p:nvPr/>
+      </p:nvGrpSpPr>
+      <p:grpSpPr>
+        <a:xfrm>
+          <a:off x="0" y="0"/>
+          <a:ext cx="0" cy="0"/>
+          <a:chOff x="0" y="0"/>
+          <a:chExt cx="0" cy="0"/>
+        </a:xfrm>
+      </p:grpSpPr>
+      <p:sp>
+        <p:nvSpPr>
+          <p:cNvPr id="2" name="Title 1">
+            <a:extLst>
+              <a:ext uri="{FF2B5EF4-FFF2-40B4-BE49-F238E27FC236}">
+                <a16:creationId xmlns:a16="http://schemas.microsoft.com/office/drawing/2014/main" id="{FB822C96-8A99-0A0B-91D7-46E9A110D7C1}"/>
+              </a:ext>
+            </a:extLst>
+          </p:cNvPr>
+          <p:cNvSpPr>
+            <a:spLocks noGrp="1"/>
+          </p:cNvSpPr>
+          <p:nvPr>
+            <p:ph type="title"/>
+          </p:nvPr>
+        </p:nvSpPr>
+        <p:spPr/>
+        <p:txBody>
+          <a:bodyPr>
+            <a:normAutofit/>
+          </a:bodyPr>
+          <a:lstStyle/>
+          <a:p>
+            <a:pPr algn="l"/>
+            <a:r>
+              <a:rPr sz="4000" b="1"/>
+              <a:t>Methodology</a:t>
+            </a:r>
+            <a:endParaRPr lang="en-SA" sz="2800" dirty="0"/>
+          </a:p>
+          <a:p>
+            <a:pPr algn="l"/>
+            <a:r>
+              <a:rPr sz="2800" b="0"/>
+              <a:t>ResCNN Architecture</a:t>
+            </a:r>
+          </a:p>
+        </p:txBody>
+      </p:sp>
+      <p:sp>
+        <p:nvSpPr>
+          <p:cNvPr id="3" name="Content Placeholder 2">
+            <a:extLst>
+              <a:ext uri="{FF2B5EF4-FFF2-40B4-BE49-F238E27FC236}">
+                <a16:creationId xmlns:a16="http://schemas.microsoft.com/office/drawing/2014/main" id="{E1A92292-E5FC-01C2-C5CE-951898939569}"/>
+              </a:ext>
+            </a:extLst>
+          </p:cNvPr>
+          <p:cNvSpPr>
+            <a:spLocks noGrp="1"/>
+          </p:cNvSpPr>
+          <p:nvPr>
+            <p:ph idx="1"/>
+          </p:nvPr>
+        </p:nvSpPr>
+        <p:spPr>
+          <a:xfrm>
+            <a:off x="363557" y="1690688"/>
+            <a:ext cx="6830457" cy="3850797"/>
+          </a:xfrm>
+        </p:spPr>
+        <p:txBody>
+          <a:bodyPr>
+            <a:normAutofit fontScale="70000" lnSpcReduction="20000"/>
+          </a:bodyPr>
+          <a:lstStyle/>
+          <a:p>
+            <a:pPr marL="0" indent="0" algn="l">
+              <a:spcAft>
+                <a:spcPts val="600"/>
+              </a:spcAft>
+              <a:buNone/>
+            </a:pPr>
+            <a:r>
+              <a:rPr sz="2600" b="1" i="0" dirty="0"/>
+              <a:t>System Pipeline:</a:t>
+            </a:r>
+          </a:p>
+          <a:p>
+            <a:pPr algn="l">
+              <a:spcAft>
+                <a:spcPts val="600"/>
+              </a:spcAft>
+            </a:pPr>
+            <a:r>
+              <a:rPr sz="2200" b="0" i="1" dirty="0"/>
+              <a:t>Raw EMG (12ch) → Bandpass + Notch → Z-score Norm → Sliding Windows (200pt, step=50) → </a:t>
+            </a:r>
+            <a:r>
+              <a:rPr sz="2200" b="0" i="1" dirty="0" err="1"/>
+              <a:t>ResCNN</a:t>
+            </a:r>
+            <a:r>
+              <a:rPr sz="2200" b="0" i="1" dirty="0"/>
+              <a:t> → </a:t>
+            </a:r>
+            <a:r>
+              <a:rPr sz="2200" b="0" i="1" dirty="0" err="1"/>
+              <a:t>Softmax</a:t>
+            </a:r>
+            <a:r>
+              <a:rPr sz="2200" b="0" i="1" dirty="0"/>
+              <a:t> → Majority Voting → Gesture Prediction</a:t>
+            </a:r>
+          </a:p>
+          <a:p>
+            <a:pPr marL="0" indent="0" algn="l">
+              <a:spcBef>
+                <a:spcPts val="1200"/>
+              </a:spcBef>
+              <a:spcAft>
+                <a:spcPts val="600"/>
+              </a:spcAft>
+              <a:buNone/>
+            </a:pPr>
+            <a:r>
+              <a:rPr sz="2600" b="1" i="0" dirty="0" err="1"/>
+              <a:t>ResCNN</a:t>
+            </a:r>
+            <a:r>
+              <a:rPr sz="2600" b="1" i="0" dirty="0"/>
+              <a:t> Design (3 Residual Blocks):</a:t>
+            </a:r>
+          </a:p>
+          <a:p>
+            <a:pPr>
+              <a:spcAft>
+                <a:spcPts val="600"/>
+              </a:spcAft>
+            </a:pPr>
+            <a:r>
+              <a:rPr sz="1700" b="0" i="0" dirty="0"/>
+              <a:t>Stem: Conv1d(12→64, k=15) → </a:t>
+            </a:r>
+            <a:r>
+              <a:rPr sz="1700" b="0" i="0" dirty="0" err="1"/>
+              <a:t>BatchNorm</a:t>
+            </a:r>
+            <a:r>
+              <a:rPr sz="1700" b="0" i="0" dirty="0"/>
+              <a:t> → GELU → </a:t>
+            </a:r>
+            <a:r>
+              <a:rPr sz="1700" b="0" i="0" dirty="0" err="1"/>
+              <a:t>MaxPool</a:t>
+            </a:r>
+            <a:r>
+              <a:rPr sz="1700" b="0" i="0" dirty="0"/>
+              <a:t>(2)</a:t>
+            </a:r>
+          </a:p>
+          <a:p>
+            <a:pPr>
+              <a:spcAft>
+                <a:spcPts val="600"/>
+              </a:spcAft>
+            </a:pPr>
+            <a:r>
+              <a:rPr sz="1700" b="0" i="0" dirty="0"/>
+              <a:t>Block 1: Conv(64→64, k=15) → BN → GELU → Conv(64→64) → BN → GELU → shortcut → </a:t>
+            </a:r>
+            <a:r>
+              <a:rPr sz="1700" b="0" i="0" dirty="0" err="1"/>
+              <a:t>MaxPool</a:t>
+            </a:r>
+            <a:r>
+              <a:rPr sz="1700" b="0" i="0" dirty="0"/>
+              <a:t>(2)</a:t>
+            </a:r>
+          </a:p>
+          <a:p>
+            <a:pPr>
+              <a:spcAft>
+                <a:spcPts val="600"/>
+              </a:spcAft>
+            </a:pPr>
+            <a:r>
+              <a:rPr sz="1700" b="0" i="0" dirty="0"/>
+              <a:t>Block 2: Conv(64→128, k=7) → BN → GELU → Conv(128→128) → BN → GELU → shortcut → </a:t>
+            </a:r>
+            <a:r>
+              <a:rPr sz="1700" b="0" i="0" dirty="0" err="1"/>
+              <a:t>MaxPool</a:t>
+            </a:r>
+            <a:r>
+              <a:rPr sz="1700" b="0" i="0" dirty="0"/>
+              <a:t>(2)</a:t>
+            </a:r>
+          </a:p>
+          <a:p>
+            <a:pPr>
+              <a:spcAft>
+                <a:spcPts val="600"/>
+              </a:spcAft>
+            </a:pPr>
+            <a:r>
+              <a:rPr sz="1700" b="0" i="0" dirty="0"/>
+              <a:t>Block 3: Conv(128→256, k=3) → BN → GELU → Conv(256→256) → BN → GELU → shortcut → </a:t>
+            </a:r>
+            <a:r>
+              <a:rPr sz="1700" b="0" i="0" dirty="0" err="1"/>
+              <a:t>MaxPool</a:t>
+            </a:r>
+            <a:r>
+              <a:rPr sz="1700" b="0" i="0" dirty="0"/>
+              <a:t>(2)</a:t>
+            </a:r>
+          </a:p>
+          <a:p>
+            <a:pPr>
+              <a:spcAft>
+                <a:spcPts val="600"/>
+              </a:spcAft>
+            </a:pPr>
+            <a:r>
+              <a:rPr sz="1700" b="0" i="0" dirty="0"/>
+              <a:t>Head: </a:t>
+            </a:r>
+            <a:r>
+              <a:rPr sz="1700" b="0" i="0" dirty="0" err="1"/>
+              <a:t>AdaptiveAvgPool</a:t>
+            </a:r>
+            <a:r>
+              <a:rPr sz="1700" b="0" i="0" dirty="0"/>
+              <a:t>(1) → Dropout(0.5) → Linear(256→5)</a:t>
+            </a:r>
+          </a:p>
+          <a:p>
+            <a:pPr>
+              <a:spcBef>
+                <a:spcPts val="800"/>
+              </a:spcBef>
+              <a:spcAft>
+                <a:spcPts val="600"/>
+              </a:spcAft>
+            </a:pPr>
+            <a:r>
+              <a:rPr sz="1700" b="0" i="1" dirty="0"/>
+              <a:t>Total trainable parameters: ~647K.</a:t>
+            </a:r>
+          </a:p>
+        </p:txBody>
+      </p:sp>
+      <p:pic>
+        <p:nvPicPr>
+          <p:cNvPr id="4" name="Picture 3" descr="image.png"/>
+          <p:cNvPicPr>
+            <a:picLocks noChangeAspect="1"/>
+          </p:cNvPicPr>
+          <p:nvPr/>
+        </p:nvPicPr>
+        <p:blipFill>
+          <a:blip r:embed="rId2"/>
+          <a:stretch>
+            <a:fillRect/>
+          </a:stretch>
+        </p:blipFill>
+        <p:spPr>
+          <a:xfrm>
+            <a:off x="7109184" y="1690688"/>
+            <a:ext cx="4937760" cy="3291840"/>
+          </a:xfrm>
+          <a:prstGeom prst="rect">
+            <a:avLst/>
+          </a:prstGeom>
+        </p:spPr>
+      </p:pic>
+    </p:spTree>
+    <p:extLst>
+      <p:ext uri="{BB962C8B-B14F-4D97-AF65-F5344CB8AC3E}">
+        <p14:creationId xmlns:p14="http://schemas.microsoft.com/office/powerpoint/2010/main" val="3286206870"/>
+      </p:ext>
+    </p:extLst>
+  </p:cSld>
+  <p:clrMapOvr>
+    <a:masterClrMapping/>
+  </p:clrMapOvr>
+</p:sld>
+</file>
+
 <file path=ppt/slides/slide8.xml><?xml version="1.0" encoding="utf-8"?>
 <p:sld xmlns:a="http://schemas.openxmlformats.org/drawingml/2006/main" xmlns:r="http://schemas.openxmlformats.org/officeDocument/2006/relationships" xmlns:p="http://schemas.openxmlformats.org/presentationml/2006/main">
   <p:cSld>
@@ -9275,7 +9306,13 @@
           <p:cNvGraphicFramePr>
             <a:graphicFrameLocks noGrp="1"/>
           </p:cNvGraphicFramePr>
-          <p:nvPr/>
+          <p:nvPr>
+            <p:extLst>
+              <p:ext uri="{D42A27DB-BD31-4B8C-83A1-F6EECF244321}">
+                <p14:modId xmlns:p14="http://schemas.microsoft.com/office/powerpoint/2010/main" val="2382969280"/>
+              </p:ext>
+            </p:extLst>
+          </p:nvPr>
         </p:nvGraphicFramePr>
         <p:xfrm>
           <a:off x="822960" y="3474720"/>
@@ -9508,7 +9545,8 @@
                         <a:defRPr sz="1400" b="1"/>
                       </a:pPr>
                       <a:r>
-                        <a:t>0.6805</a:t>
+                        <a:rPr dirty="0"/>
+                        <a:t>0.68</a:t>
                       </a:r>
                     </a:p>
                   </a:txBody>
@@ -9523,7 +9561,8 @@
                         <a:defRPr sz="1400" b="1"/>
                       </a:pPr>
                       <a:r>
-                        <a:t>0.8316</a:t>
+                        <a:rPr dirty="0"/>
+                        <a:t>0.83</a:t>
                       </a:r>
                     </a:p>
                   </a:txBody>
@@ -9538,7 +9577,8 @@
                         <a:defRPr sz="1400" b="1"/>
                       </a:pPr>
                       <a:r>
-                        <a:t>0.8254</a:t>
+                        <a:rPr dirty="0"/>
+                        <a:t>0.82</a:t>
                       </a:r>
                     </a:p>
                   </a:txBody>
@@ -9605,6 +9645,7 @@
                         <a:defRPr sz="1400"/>
                       </a:pPr>
                       <a:r>
+                        <a:rPr dirty="0"/>
                         <a:t>—</a:t>
                       </a:r>
                     </a:p>
